--- a/curriculum/M03/W05/L01/slides.pptx
+++ b/curriculum/M03/W05/L01/slides.pptx
@@ -623,7 +623,7 @@
           <a:lstStyle/>
           <a:p>
             <a:r>
-              <a:t>암의 후성유전 이상과 표적 치료, 그리고 세 가지 구분. 종양 억제 유전자 promoter의 국소적 과메틸화와 유전체 전반의 저메틸화가 함께 나타나는 양상, DNMT·HDAC·EZH2·IDH·BET 억제제의 작용 지점, 그리고 분자 표지의 변화·체세포 상태 유지·세대 간 전달의 시간 규모와 근거 수준의 차이를 함께 보인다.</a:t>
+              <a:t>암의 후성유전 이상과 표적 치료, 그리고 세 가지 구분. A는 종양 억제 유전자 promoter의 CpG island에 표지가 몰려 붙는 국소적 과메틸화와 반복서열 구간에서 표지가 빠지는 전체적 저메틸화를 같은 유전체 축에 나란히 놓아, 문제가 methylation의 총량이 아니라 배치라는 점을 보인다. B는 위 표의 약물이 writer, eraser, reader, 대사물 가운데 어느 자리에 작용하는지를 보이며, 적응증은 표에 있으므로 그림에서는 작용 지점만 다룬다. C는 세 현상을 하나의 시간 축에 올려 구분하고, 생식세포 재설정을 끊긴 축으로 그려 세대 간 전달이 앞의 둘과 근거 수준이 다름을 보인다.</a:t>
             </a:r>
           </a:p>
         </p:txBody>
@@ -1603,7 +1603,7 @@
           <a:lstStyle/>
           <a:p>
             <a:r>
-              <a:t>DNA methylation의 화학적 실체와 전사를 낮추는 두 기전. Cytosine 5번 탄소의 메틸화와 CpG 배열의 대칭성, histone methylation과 표적 분자의 차이, CpG island의 위치와 성질, 전사인자 결합의 직접 방해와 methyl-CpG 결합 단백질이 억제 복합체를 데려오는 경로를 함께 보인다.</a:t>
+              <a:t>DNA methylation의 화학적 실체와 전사를 낮추는 두 기전. A는 같은 methylation이라도 표적 분자가 histone의 잔기인지 cytosine의 5번 탄소인지가 다르다는 것을, B는 CpG가 같은 가닥에서 C 다음에 G가 오는 배열이고 p는 인산이라는 것과 반대 가닥도 CpG여서 양쪽이 표지를 가질 수 있다는 대칭성을, C는 CpG island가 promoter에 놓이는 자리를, D는 methyl기가 결합면을 가려 전사인자를 막는 직접 경로와 MeCP2가 표지를 읽고 HDAC을 포함한 공동억제인자를 데려오는 reader 경로를 보인다. 이 대칭성이 8절 유지 기전의 근거가 되고, 두 경로 가운데 reader 쪽이 염색질 변화가 퍼지므로 작용 범위가 더 넓다.</a:t>
             </a:r>
           </a:p>
         </p:txBody>
@@ -14803,8 +14803,8 @@
         </p:blipFill>
         <p:spPr>
           <a:xfrm>
-            <a:off x="1848967" y="1325880"/>
-            <a:ext cx="8493760" cy="4343400"/>
+            <a:off x="2046915" y="1325880"/>
+            <a:ext cx="8097864" cy="4343400"/>
           </a:xfrm>
           <a:prstGeom prst="rect">
             <a:avLst/>
@@ -14843,7 +14843,7 @@
                 <a:ea typeface="Malgun Gothic"/>
                 <a:cs typeface="Malgun Gothic"/>
               </a:rPr>
-              <a:t>DNA methylation의 화학적 실체와 전사를 낮추는 두 기전. Cytosine 5번 탄소의 메틸화와 CpG 배열의 대칭성, histone methylation과 표적 분자의 차이, CpG island의 위치와 성질, 전사인자 결합의 직접 방해와 methyl-CpG 결합 단백질이 억제 복합체를 데려오는 경로를 함께 보인다.</a:t>
+              <a:t>DNA methylation의 화학적 실체와 전사를 낮추는 두 기전. A는 같은 methylation이라도 표적 분자가 histone의 잔기인지 cytosine의 5번 탄소인지가 다르다는 것을, B는 CpG가 같은 가닥에서 C 다음에 G가 오는 배열이고 p는 인산이라는 것과 반대 가닥도 CpG여서 양쪽이 표지를 가질 수 있다는 대칭성을, C는 CpG island가 promoter에 놓이는 자리를, D는 methyl기가 결합면을 가려 전사인자를 막는 직접 경로와 MeCP2가 표지를 읽고 HDAC을 포함한 공동억제인자를 데려오는 reader 경로를 보인다. 이 대칭성이 8절 유지 기전의 근거가 되고, 두 경로 가운데 reader 쪽이 염색질 변화가 퍼지므로 작용 범위가 더 넓다.</a:t>
             </a:r>
           </a:p>
         </p:txBody>
@@ -22576,8 +22576,8 @@
         </p:blipFill>
         <p:spPr>
           <a:xfrm>
-            <a:off x="1848967" y="1325880"/>
-            <a:ext cx="8493760" cy="4343400"/>
+            <a:off x="1955692" y="1325880"/>
+            <a:ext cx="8280311" cy="4343400"/>
           </a:xfrm>
           <a:prstGeom prst="rect">
             <a:avLst/>
@@ -22616,7 +22616,7 @@
                 <a:ea typeface="Malgun Gothic"/>
                 <a:cs typeface="Malgun Gothic"/>
               </a:rPr>
-              <a:t>암의 후성유전 이상과 표적 치료, 그리고 세 가지 구분. 종양 억제 유전자 promoter의 국소적 과메틸화와 유전체 전반의 저메틸화가 함께 나타나는 양상, DNMT·HDAC·EZH2·IDH·BET 억제제의 작용 지점, 그리고 분자 표지의 변화·체세포 상태 유지·세대 간 전달의 시간 규모와 근거 수준의 차이를 함께 보인다.</a:t>
+              <a:t>암의 후성유전 이상과 표적 치료, 그리고 세 가지 구분. A는 종양 억제 유전자 promoter의 CpG island에 표지가 몰려 붙는 국소적 과메틸화와 반복서열 구간에서 표지가 빠지는 전체적 저메틸화를 같은 유전체 축에 나란히 놓아, 문제가 methylation의 총량이 아니라 배치라는 점을 보인다. B는 위 표의 약물이 writer, eraser, reader, 대사물 가운데 어느 자리에 작용하는지를 보이며, 적응증은 표에 있으므로 그림에서는 작용 지점만 다룬다. C는 세 현상을 하나의 시간 축에 올려 구분하고, 생식세포 재설정을 끊긴 축으로 그려 세대 간 전달이 앞의 둘과 근거 수준이 다름을 보인다.</a:t>
             </a:r>
           </a:p>
         </p:txBody>
